--- a/docs/PMG_Intelligence_Presentation.pptx
+++ b/docs/PMG_Intelligence_Presentation.pptx
@@ -7246,7 +7246,7 @@
                 <a:ea typeface="Calibri" pitchFamily="34" charset="-122"/>
                 <a:cs typeface="Calibri" pitchFamily="34" charset="-120"/>
               </a:rPr>
-              <a:t>70</a:t>
+              <a:t>92</a:t>
             </a:r>
             <a:endParaRPr lang="en-US" sz="4000" dirty="0"/>
           </a:p>
